--- a/VenueOn_MVP_아키텍처_v3.pptx
+++ b/VenueOn_MVP_아키텍처_v3.pptx
@@ -16,7 +16,6 @@
     <p:sldId id="264" r:id="rId15"/>
     <p:sldId id="265" r:id="rId16"/>
     <p:sldId id="266" r:id="rId17"/>
-    <p:sldId id="267" r:id="rId18"/>
   </p:sldIdLst>
   <p:sldSz cx="12191695" cy="6858000" type="screen4x3"/>
   <p:notesSz cx="6858000" cy="9144000"/>
@@ -3430,21 +3429,57 @@
               </a:defRPr>
             </a:pPr>
             <a:r>
-              <a:t>📌 개발 일정 (8주)</a:t>
-            </a:r>
-          </a:p>
-        </p:txBody>
-      </p:sp>
-      <p:sp>
-        <p:nvSpPr>
-          <p:cNvPr id="4" name="Rounded Rectangle 3"/>
+              <a:t>📌 프로젝트 일정 (MVP 1주 완성)</a:t>
+            </a:r>
+          </a:p>
+        </p:txBody>
+      </p:sp>
+      <p:sp>
+        <p:nvSpPr>
+          <p:cNvPr id="4" name="TextBox 3"/>
+          <p:cNvSpPr txBox="1"/>
+          <p:nvPr/>
+        </p:nvSpPr>
+        <p:spPr>
+          <a:xfrm>
+            <a:off x="731520" y="1097280"/>
+            <a:ext cx="10058400" cy="457200"/>
+          </a:xfrm>
+          <a:prstGeom prst="rect">
+            <a:avLst/>
+          </a:prstGeom>
+          <a:noFill/>
+        </p:spPr>
+        <p:txBody>
+          <a:bodyPr wrap="square">
+            <a:spAutoFit/>
+          </a:bodyPr>
+          <a:lstStyle/>
+          <a:p>
+            <a:pPr algn="l">
+              <a:defRPr sz="2000" b="1">
+                <a:solidFill>
+                  <a:srgbClr val="F59E0B"/>
+                </a:solidFill>
+                <a:latin typeface="맑은 고딕"/>
+              </a:defRPr>
+            </a:pPr>
+            <a:r>
+              <a:t>1주일 내 핵심 기능 중심의 단기 MVP 구축 및 검증</a:t>
+            </a:r>
+          </a:p>
+        </p:txBody>
+      </p:sp>
+      <p:sp>
+        <p:nvSpPr>
+          <p:cNvPr id="5" name="Rounded Rectangle 4"/>
           <p:cNvSpPr/>
           <p:nvPr/>
         </p:nvSpPr>
         <p:spPr>
           <a:xfrm>
-            <a:off x="731520" y="1005840"/>
-            <a:ext cx="10698480" cy="640080"/>
+            <a:off x="731520" y="2011680"/>
+            <a:ext cx="10698480" cy="822960"/>
           </a:xfrm>
           <a:prstGeom prst="roundRect">
             <a:avLst/>
@@ -3480,13 +3515,13 @@
       </p:sp>
       <p:sp>
         <p:nvSpPr>
-          <p:cNvPr id="5" name="TextBox 4"/>
-          <p:cNvSpPr txBox="1"/>
-          <p:nvPr/>
-        </p:nvSpPr>
-        <p:spPr>
-          <a:xfrm>
-            <a:off x="914400" y="1097280"/>
+          <p:cNvPr id="6" name="TextBox 5"/>
+          <p:cNvSpPr txBox="1"/>
+          <p:nvPr/>
+        </p:nvSpPr>
+        <p:spPr>
+          <a:xfrm>
+            <a:off x="914400" y="2194560"/>
             <a:ext cx="1371600" cy="457200"/>
           </a:xfrm>
           <a:prstGeom prst="rect">
@@ -3501,7 +3536,7 @@
           <a:lstStyle/>
           <a:p>
             <a:pPr algn="l">
-              <a:defRPr sz="1400" b="1">
+              <a:defRPr sz="1800" b="1">
                 <a:solidFill>
                   <a:srgbClr val="F1F5F9"/>
                 </a:solidFill>
@@ -3509,20 +3544,20 @@
               </a:defRPr>
             </a:pPr>
             <a:r>
-              <a:t>1주차</a:t>
-            </a:r>
-          </a:p>
-        </p:txBody>
-      </p:sp>
-      <p:sp>
-        <p:nvSpPr>
-          <p:cNvPr id="6" name="TextBox 5"/>
-          <p:cNvSpPr txBox="1"/>
-          <p:nvPr/>
-        </p:nvSpPr>
-        <p:spPr>
-          <a:xfrm>
-            <a:off x="2286000" y="1097280"/>
+              <a:t>1~2일차</a:t>
+            </a:r>
+          </a:p>
+        </p:txBody>
+      </p:sp>
+      <p:sp>
+        <p:nvSpPr>
+          <p:cNvPr id="7" name="TextBox 6"/>
+          <p:cNvSpPr txBox="1"/>
+          <p:nvPr/>
+        </p:nvSpPr>
+        <p:spPr>
+          <a:xfrm>
+            <a:off x="2560320" y="2194560"/>
             <a:ext cx="2743200" cy="457200"/>
           </a:xfrm>
           <a:prstGeom prst="rect">
@@ -3537,7 +3572,7 @@
           <a:lstStyle/>
           <a:p>
             <a:pPr algn="l">
-              <a:defRPr sz="1400" b="1">
+              <a:defRPr sz="1800" b="1">
                 <a:solidFill>
                   <a:srgbClr val="6366F1"/>
                 </a:solidFill>
@@ -3545,20 +3580,20 @@
               </a:defRPr>
             </a:pPr>
             <a:r>
-              <a:t>🏗️ 설계</a:t>
-            </a:r>
-          </a:p>
-        </p:txBody>
-      </p:sp>
-      <p:sp>
-        <p:nvSpPr>
-          <p:cNvPr id="7" name="TextBox 6"/>
-          <p:cNvSpPr txBox="1"/>
-          <p:nvPr/>
-        </p:nvSpPr>
-        <p:spPr>
-          <a:xfrm>
-            <a:off x="5029200" y="1097280"/>
+              <a:t>🏗️ 설계/세팅</a:t>
+            </a:r>
+          </a:p>
+        </p:txBody>
+      </p:sp>
+      <p:sp>
+        <p:nvSpPr>
+          <p:cNvPr id="8" name="TextBox 7"/>
+          <p:cNvSpPr txBox="1"/>
+          <p:nvPr/>
+        </p:nvSpPr>
+        <p:spPr>
+          <a:xfrm>
+            <a:off x="5029200" y="2194560"/>
             <a:ext cx="5943600" cy="457200"/>
           </a:xfrm>
           <a:prstGeom prst="rect">
@@ -3573,7 +3608,7 @@
           <a:lstStyle/>
           <a:p>
             <a:pPr algn="l">
-              <a:defRPr sz="1300" b="0">
+              <a:defRPr sz="1500" b="0">
                 <a:solidFill>
                   <a:srgbClr val="94A3B8"/>
                 </a:solidFill>
@@ -3581,21 +3616,21 @@
               </a:defRPr>
             </a:pPr>
             <a:r>
-              <a:t>요구사항/ERD/API 설계, 와이어프레임, Docker 셋업</a:t>
-            </a:r>
-          </a:p>
-        </p:txBody>
-      </p:sp>
-      <p:sp>
-        <p:nvSpPr>
-          <p:cNvPr id="8" name="Rounded Rectangle 7"/>
+              <a:t>요구사항/WBS/ERD/API 설계, 아키텍처 구축 (Docker/Hexagonal)</a:t>
+            </a:r>
+          </a:p>
+        </p:txBody>
+      </p:sp>
+      <p:sp>
+        <p:nvSpPr>
+          <p:cNvPr id="9" name="Rounded Rectangle 8"/>
           <p:cNvSpPr/>
           <p:nvPr/>
         </p:nvSpPr>
         <p:spPr>
           <a:xfrm>
-            <a:off x="731520" y="1783080"/>
-            <a:ext cx="10698480" cy="640080"/>
+            <a:off x="731520" y="3108960"/>
+            <a:ext cx="10698480" cy="822960"/>
           </a:xfrm>
           <a:prstGeom prst="roundRect">
             <a:avLst/>
@@ -3631,13 +3666,13 @@
       </p:sp>
       <p:sp>
         <p:nvSpPr>
-          <p:cNvPr id="9" name="TextBox 8"/>
-          <p:cNvSpPr txBox="1"/>
-          <p:nvPr/>
-        </p:nvSpPr>
-        <p:spPr>
-          <a:xfrm>
-            <a:off x="914400" y="1874520"/>
+          <p:cNvPr id="10" name="TextBox 9"/>
+          <p:cNvSpPr txBox="1"/>
+          <p:nvPr/>
+        </p:nvSpPr>
+        <p:spPr>
+          <a:xfrm>
+            <a:off x="914400" y="3291840"/>
             <a:ext cx="1371600" cy="457200"/>
           </a:xfrm>
           <a:prstGeom prst="rect">
@@ -3652,7 +3687,7 @@
           <a:lstStyle/>
           <a:p>
             <a:pPr algn="l">
-              <a:defRPr sz="1400" b="1">
+              <a:defRPr sz="1800" b="1">
                 <a:solidFill>
                   <a:srgbClr val="F1F5F9"/>
                 </a:solidFill>
@@ -3660,20 +3695,20 @@
               </a:defRPr>
             </a:pPr>
             <a:r>
-              <a:t>2주차</a:t>
-            </a:r>
-          </a:p>
-        </p:txBody>
-      </p:sp>
-      <p:sp>
-        <p:nvSpPr>
-          <p:cNvPr id="10" name="TextBox 9"/>
-          <p:cNvSpPr txBox="1"/>
-          <p:nvPr/>
-        </p:nvSpPr>
-        <p:spPr>
-          <a:xfrm>
-            <a:off x="2286000" y="1874520"/>
+              <a:t>3~4일차</a:t>
+            </a:r>
+          </a:p>
+        </p:txBody>
+      </p:sp>
+      <p:sp>
+        <p:nvSpPr>
+          <p:cNvPr id="11" name="TextBox 10"/>
+          <p:cNvSpPr txBox="1"/>
+          <p:nvPr/>
+        </p:nvSpPr>
+        <p:spPr>
+          <a:xfrm>
+            <a:off x="2560320" y="3291840"/>
             <a:ext cx="2743200" cy="457200"/>
           </a:xfrm>
           <a:prstGeom prst="rect">
@@ -3688,7 +3723,7 @@
           <a:lstStyle/>
           <a:p>
             <a:pPr algn="l">
-              <a:defRPr sz="1400" b="1">
+              <a:defRPr sz="1800" b="1">
                 <a:solidFill>
                   <a:srgbClr val="6366F1"/>
                 </a:solidFill>
@@ -3696,20 +3731,20 @@
               </a:defRPr>
             </a:pPr>
             <a:r>
-              <a:t>🔧 인증+이벤트 기반</a:t>
-            </a:r>
-          </a:p>
-        </p:txBody>
-      </p:sp>
-      <p:sp>
-        <p:nvSpPr>
-          <p:cNvPr id="11" name="TextBox 10"/>
-          <p:cNvSpPr txBox="1"/>
-          <p:nvPr/>
-        </p:nvSpPr>
-        <p:spPr>
-          <a:xfrm>
-            <a:off x="5029200" y="1874520"/>
+              <a:t>🔧 핵심 백엔드</a:t>
+            </a:r>
+          </a:p>
+        </p:txBody>
+      </p:sp>
+      <p:sp>
+        <p:nvSpPr>
+          <p:cNvPr id="12" name="TextBox 11"/>
+          <p:cNvSpPr txBox="1"/>
+          <p:nvPr/>
+        </p:nvSpPr>
+        <p:spPr>
+          <a:xfrm>
+            <a:off x="5029200" y="3291840"/>
             <a:ext cx="5943600" cy="457200"/>
           </a:xfrm>
           <a:prstGeom prst="rect">
@@ -3724,7 +3759,7 @@
           <a:lstStyle/>
           <a:p>
             <a:pPr algn="l">
-              <a:defRPr sz="1300" b="0">
+              <a:defRPr sz="1500" b="0">
                 <a:solidFill>
                   <a:srgbClr val="94A3B8"/>
                 </a:solidFill>
@@ -3732,21 +3767,21 @@
               </a:defRPr>
             </a:pPr>
             <a:r>
-              <a:t>User Service, Gateway, Event CRUD, 프론트 공통</a:t>
-            </a:r>
-          </a:p>
-        </p:txBody>
-      </p:sp>
-      <p:sp>
-        <p:nvSpPr>
-          <p:cNvPr id="12" name="Rounded Rectangle 11"/>
+              <a:t>인증(User)/이벤트(Event) API, 커뮤니티(Community) API</a:t>
+            </a:r>
+          </a:p>
+        </p:txBody>
+      </p:sp>
+      <p:sp>
+        <p:nvSpPr>
+          <p:cNvPr id="13" name="Rounded Rectangle 12"/>
           <p:cNvSpPr/>
           <p:nvPr/>
         </p:nvSpPr>
         <p:spPr>
           <a:xfrm>
-            <a:off x="731520" y="2560320"/>
-            <a:ext cx="10698480" cy="640080"/>
+            <a:off x="731520" y="4206240"/>
+            <a:ext cx="10698480" cy="822960"/>
           </a:xfrm>
           <a:prstGeom prst="roundRect">
             <a:avLst/>
@@ -3782,13 +3817,13 @@
       </p:sp>
       <p:sp>
         <p:nvSpPr>
-          <p:cNvPr id="13" name="TextBox 12"/>
-          <p:cNvSpPr txBox="1"/>
-          <p:nvPr/>
-        </p:nvSpPr>
-        <p:spPr>
-          <a:xfrm>
-            <a:off x="914400" y="2651760"/>
+          <p:cNvPr id="14" name="TextBox 13"/>
+          <p:cNvSpPr txBox="1"/>
+          <p:nvPr/>
+        </p:nvSpPr>
+        <p:spPr>
+          <a:xfrm>
+            <a:off x="914400" y="4389120"/>
             <a:ext cx="1371600" cy="457200"/>
           </a:xfrm>
           <a:prstGeom prst="rect">
@@ -3803,7 +3838,7 @@
           <a:lstStyle/>
           <a:p>
             <a:pPr algn="l">
-              <a:defRPr sz="1400" b="1">
+              <a:defRPr sz="1800" b="1">
                 <a:solidFill>
                   <a:srgbClr val="F1F5F9"/>
                 </a:solidFill>
@@ -3811,20 +3846,20 @@
               </a:defRPr>
             </a:pPr>
             <a:r>
-              <a:t>3주차</a:t>
-            </a:r>
-          </a:p>
-        </p:txBody>
-      </p:sp>
-      <p:sp>
-        <p:nvSpPr>
-          <p:cNvPr id="14" name="TextBox 13"/>
-          <p:cNvSpPr txBox="1"/>
-          <p:nvPr/>
-        </p:nvSpPr>
-        <p:spPr>
-          <a:xfrm>
-            <a:off x="2286000" y="2651760"/>
+              <a:t>5~6일차</a:t>
+            </a:r>
+          </a:p>
+        </p:txBody>
+      </p:sp>
+      <p:sp>
+        <p:nvSpPr>
+          <p:cNvPr id="15" name="TextBox 14"/>
+          <p:cNvSpPr txBox="1"/>
+          <p:nvPr/>
+        </p:nvSpPr>
+        <p:spPr>
+          <a:xfrm>
+            <a:off x="2560320" y="4389120"/>
             <a:ext cx="2743200" cy="457200"/>
           </a:xfrm>
           <a:prstGeom prst="rect">
@@ -3839,7 +3874,7 @@
           <a:lstStyle/>
           <a:p>
             <a:pPr algn="l">
-              <a:defRPr sz="1400" b="1">
+              <a:defRPr sz="1800" b="1">
                 <a:solidFill>
                   <a:srgbClr val="6366F1"/>
                 </a:solidFill>
@@ -3847,20 +3882,20 @@
               </a:defRPr>
             </a:pPr>
             <a:r>
-              <a:t>🔧 이벤트 완성</a:t>
-            </a:r>
-          </a:p>
-        </p:txBody>
-      </p:sp>
-      <p:sp>
-        <p:nvSpPr>
-          <p:cNvPr id="15" name="TextBox 14"/>
-          <p:cNvSpPr txBox="1"/>
-          <p:nvPr/>
-        </p:nvSpPr>
-        <p:spPr>
-          <a:xfrm>
-            <a:off x="5029200" y="2651760"/>
+              <a:t>🎨 프론트/결제</a:t>
+            </a:r>
+          </a:p>
+        </p:txBody>
+      </p:sp>
+      <p:sp>
+        <p:nvSpPr>
+          <p:cNvPr id="16" name="TextBox 15"/>
+          <p:cNvSpPr txBox="1"/>
+          <p:nvPr/>
+        </p:nvSpPr>
+        <p:spPr>
+          <a:xfrm>
+            <a:off x="5029200" y="4389120"/>
             <a:ext cx="5943600" cy="457200"/>
           </a:xfrm>
           <a:prstGeom prst="rect">
@@ -3875,7 +3910,7 @@
           <a:lstStyle/>
           <a:p>
             <a:pPr algn="l">
-              <a:defRPr sz="1300" b="0">
+              <a:defRPr sz="1500" b="0">
                 <a:solidFill>
                   <a:srgbClr val="94A3B8"/>
                 </a:solidFill>
@@ -3883,474 +3918,21 @@
               </a:defRPr>
             </a:pPr>
             <a:r>
-              <a:t>검색/필터, 세션 CRUD, 티켓+결제, 이벤트 프론트</a:t>
-            </a:r>
-          </a:p>
-        </p:txBody>
-      </p:sp>
-      <p:sp>
-        <p:nvSpPr>
-          <p:cNvPr id="16" name="Rounded Rectangle 15"/>
+              <a:t>Next.js UI &amp; API 연동, 포트원 결제 연동 (테스트)</a:t>
+            </a:r>
+          </a:p>
+        </p:txBody>
+      </p:sp>
+      <p:sp>
+        <p:nvSpPr>
+          <p:cNvPr id="17" name="Rounded Rectangle 16"/>
           <p:cNvSpPr/>
           <p:nvPr/>
         </p:nvSpPr>
         <p:spPr>
           <a:xfrm>
-            <a:off x="731520" y="3337560"/>
-            <a:ext cx="10698480" cy="640080"/>
-          </a:xfrm>
-          <a:prstGeom prst="roundRect">
-            <a:avLst/>
-          </a:prstGeom>
-          <a:solidFill>
-            <a:srgbClr val="1E293B"/>
-          </a:solidFill>
-          <a:ln>
-            <a:noFill/>
-          </a:ln>
-        </p:spPr>
-        <p:style>
-          <a:lnRef idx="1">
-            <a:schemeClr val="accent1"/>
-          </a:lnRef>
-          <a:fillRef idx="3">
-            <a:schemeClr val="accent1"/>
-          </a:fillRef>
-          <a:effectRef idx="2">
-            <a:schemeClr val="accent1"/>
-          </a:effectRef>
-          <a:fontRef idx="minor">
-            <a:schemeClr val="lt1"/>
-          </a:fontRef>
-        </p:style>
-        <p:txBody>
-          <a:bodyPr rtlCol="0" anchor="ctr"/>
-          <a:lstStyle/>
-          <a:p>
-            <a:pPr algn="ctr"/>
-          </a:p>
-        </p:txBody>
-      </p:sp>
-      <p:sp>
-        <p:nvSpPr>
-          <p:cNvPr id="17" name="TextBox 16"/>
-          <p:cNvSpPr txBox="1"/>
-          <p:nvPr/>
-        </p:nvSpPr>
-        <p:spPr>
-          <a:xfrm>
-            <a:off x="914400" y="3429000"/>
-            <a:ext cx="1371600" cy="457200"/>
-          </a:xfrm>
-          <a:prstGeom prst="rect">
-            <a:avLst/>
-          </a:prstGeom>
-          <a:noFill/>
-        </p:spPr>
-        <p:txBody>
-          <a:bodyPr wrap="square">
-            <a:spAutoFit/>
-          </a:bodyPr>
-          <a:lstStyle/>
-          <a:p>
-            <a:pPr algn="l">
-              <a:defRPr sz="1400" b="1">
-                <a:solidFill>
-                  <a:srgbClr val="F1F5F9"/>
-                </a:solidFill>
-                <a:latin typeface="맑은 고딕"/>
-              </a:defRPr>
-            </a:pPr>
-            <a:r>
-              <a:t>4주차</a:t>
-            </a:r>
-          </a:p>
-        </p:txBody>
-      </p:sp>
-      <p:sp>
-        <p:nvSpPr>
-          <p:cNvPr id="18" name="TextBox 17"/>
-          <p:cNvSpPr txBox="1"/>
-          <p:nvPr/>
-        </p:nvSpPr>
-        <p:spPr>
-          <a:xfrm>
-            <a:off x="2286000" y="3429000"/>
-            <a:ext cx="2743200" cy="457200"/>
-          </a:xfrm>
-          <a:prstGeom prst="rect">
-            <a:avLst/>
-          </a:prstGeom>
-          <a:noFill/>
-        </p:spPr>
-        <p:txBody>
-          <a:bodyPr wrap="square">
-            <a:spAutoFit/>
-          </a:bodyPr>
-          <a:lstStyle/>
-          <a:p>
-            <a:pPr algn="l">
-              <a:defRPr sz="1400" b="1">
-                <a:solidFill>
-                  <a:srgbClr val="6366F1"/>
-                </a:solidFill>
-                <a:latin typeface="맑은 고딕"/>
-              </a:defRPr>
-            </a:pPr>
-            <a:r>
-              <a:t>🔧 커뮤니티</a:t>
-            </a:r>
-          </a:p>
-        </p:txBody>
-      </p:sp>
-      <p:sp>
-        <p:nvSpPr>
-          <p:cNvPr id="19" name="TextBox 18"/>
-          <p:cNvSpPr txBox="1"/>
-          <p:nvPr/>
-        </p:nvSpPr>
-        <p:spPr>
-          <a:xfrm>
-            <a:off x="5029200" y="3429000"/>
-            <a:ext cx="5943600" cy="457200"/>
-          </a:xfrm>
-          <a:prstGeom prst="rect">
-            <a:avLst/>
-          </a:prstGeom>
-          <a:noFill/>
-        </p:spPr>
-        <p:txBody>
-          <a:bodyPr wrap="square">
-            <a:spAutoFit/>
-          </a:bodyPr>
-          <a:lstStyle/>
-          <a:p>
-            <a:pPr algn="l">
-              <a:defRPr sz="1300" b="0">
-                <a:solidFill>
-                  <a:srgbClr val="94A3B8"/>
-                </a:solidFill>
-                <a:latin typeface="맑은 고딕"/>
-              </a:defRPr>
-            </a:pPr>
-            <a:r>
-              <a:t>커뮤니티 CRUD, 게시글/댓글, 커뮤니티 프론트</a:t>
-            </a:r>
-          </a:p>
-        </p:txBody>
-      </p:sp>
-      <p:sp>
-        <p:nvSpPr>
-          <p:cNvPr id="20" name="Rounded Rectangle 19"/>
-          <p:cNvSpPr/>
-          <p:nvPr/>
-        </p:nvSpPr>
-        <p:spPr>
-          <a:xfrm>
-            <a:off x="731520" y="4114800"/>
-            <a:ext cx="10698480" cy="640080"/>
-          </a:xfrm>
-          <a:prstGeom prst="roundRect">
-            <a:avLst/>
-          </a:prstGeom>
-          <a:solidFill>
-            <a:srgbClr val="1E293B"/>
-          </a:solidFill>
-          <a:ln>
-            <a:noFill/>
-          </a:ln>
-        </p:spPr>
-        <p:style>
-          <a:lnRef idx="1">
-            <a:schemeClr val="accent1"/>
-          </a:lnRef>
-          <a:fillRef idx="3">
-            <a:schemeClr val="accent1"/>
-          </a:fillRef>
-          <a:effectRef idx="2">
-            <a:schemeClr val="accent1"/>
-          </a:effectRef>
-          <a:fontRef idx="minor">
-            <a:schemeClr val="lt1"/>
-          </a:fontRef>
-        </p:style>
-        <p:txBody>
-          <a:bodyPr rtlCol="0" anchor="ctr"/>
-          <a:lstStyle/>
-          <a:p>
-            <a:pPr algn="ctr"/>
-          </a:p>
-        </p:txBody>
-      </p:sp>
-      <p:sp>
-        <p:nvSpPr>
-          <p:cNvPr id="21" name="TextBox 20"/>
-          <p:cNvSpPr txBox="1"/>
-          <p:nvPr/>
-        </p:nvSpPr>
-        <p:spPr>
-          <a:xfrm>
-            <a:off x="914400" y="4206240"/>
-            <a:ext cx="1371600" cy="457200"/>
-          </a:xfrm>
-          <a:prstGeom prst="rect">
-            <a:avLst/>
-          </a:prstGeom>
-          <a:noFill/>
-        </p:spPr>
-        <p:txBody>
-          <a:bodyPr wrap="square">
-            <a:spAutoFit/>
-          </a:bodyPr>
-          <a:lstStyle/>
-          <a:p>
-            <a:pPr algn="l">
-              <a:defRPr sz="1400" b="1">
-                <a:solidFill>
-                  <a:srgbClr val="F1F5F9"/>
-                </a:solidFill>
-                <a:latin typeface="맑은 고딕"/>
-              </a:defRPr>
-            </a:pPr>
-            <a:r>
-              <a:t>5주차</a:t>
-            </a:r>
-          </a:p>
-        </p:txBody>
-      </p:sp>
-      <p:sp>
-        <p:nvSpPr>
-          <p:cNvPr id="22" name="TextBox 21"/>
-          <p:cNvSpPr txBox="1"/>
-          <p:nvPr/>
-        </p:nvSpPr>
-        <p:spPr>
-          <a:xfrm>
-            <a:off x="2286000" y="4206240"/>
-            <a:ext cx="2743200" cy="457200"/>
-          </a:xfrm>
-          <a:prstGeom prst="rect">
-            <a:avLst/>
-          </a:prstGeom>
-          <a:noFill/>
-        </p:spPr>
-        <p:txBody>
-          <a:bodyPr wrap="square">
-            <a:spAutoFit/>
-          </a:bodyPr>
-          <a:lstStyle/>
-          <a:p>
-            <a:pPr algn="l">
-              <a:defRPr sz="1400" b="1">
-                <a:solidFill>
-                  <a:srgbClr val="6366F1"/>
-                </a:solidFill>
-                <a:latin typeface="맑은 고딕"/>
-              </a:defRPr>
-            </a:pPr>
-            <a:r>
-              <a:t>🔧 마이페이지+연동</a:t>
-            </a:r>
-          </a:p>
-        </p:txBody>
-      </p:sp>
-      <p:sp>
-        <p:nvSpPr>
-          <p:cNvPr id="23" name="TextBox 22"/>
-          <p:cNvSpPr txBox="1"/>
-          <p:nvPr/>
-        </p:nvSpPr>
-        <p:spPr>
-          <a:xfrm>
-            <a:off x="5029200" y="4206240"/>
-            <a:ext cx="5943600" cy="457200"/>
-          </a:xfrm>
-          <a:prstGeom prst="rect">
-            <a:avLst/>
-          </a:prstGeom>
-          <a:noFill/>
-        </p:spPr>
-        <p:txBody>
-          <a:bodyPr wrap="square">
-            <a:spAutoFit/>
-          </a:bodyPr>
-          <a:lstStyle/>
-          <a:p>
-            <a:pPr algn="l">
-              <a:defRPr sz="1300" b="0">
-                <a:solidFill>
-                  <a:srgbClr val="94A3B8"/>
-                </a:solidFill>
-                <a:latin typeface="맑은 고딕"/>
-              </a:defRPr>
-            </a:pPr>
-            <a:r>
-              <a:t>마이페이지, 서비스 간 OpenFeign 연동</a:t>
-            </a:r>
-          </a:p>
-        </p:txBody>
-      </p:sp>
-      <p:sp>
-        <p:nvSpPr>
-          <p:cNvPr id="24" name="Rounded Rectangle 23"/>
-          <p:cNvSpPr/>
-          <p:nvPr/>
-        </p:nvSpPr>
-        <p:spPr>
-          <a:xfrm>
-            <a:off x="731520" y="4892040"/>
-            <a:ext cx="10698480" cy="640080"/>
-          </a:xfrm>
-          <a:prstGeom prst="roundRect">
-            <a:avLst/>
-          </a:prstGeom>
-          <a:solidFill>
-            <a:srgbClr val="1E293B"/>
-          </a:solidFill>
-          <a:ln>
-            <a:noFill/>
-          </a:ln>
-        </p:spPr>
-        <p:style>
-          <a:lnRef idx="1">
-            <a:schemeClr val="accent1"/>
-          </a:lnRef>
-          <a:fillRef idx="3">
-            <a:schemeClr val="accent1"/>
-          </a:fillRef>
-          <a:effectRef idx="2">
-            <a:schemeClr val="accent1"/>
-          </a:effectRef>
-          <a:fontRef idx="minor">
-            <a:schemeClr val="lt1"/>
-          </a:fontRef>
-        </p:style>
-        <p:txBody>
-          <a:bodyPr rtlCol="0" anchor="ctr"/>
-          <a:lstStyle/>
-          <a:p>
-            <a:pPr algn="ctr"/>
-          </a:p>
-        </p:txBody>
-      </p:sp>
-      <p:sp>
-        <p:nvSpPr>
-          <p:cNvPr id="25" name="TextBox 24"/>
-          <p:cNvSpPr txBox="1"/>
-          <p:nvPr/>
-        </p:nvSpPr>
-        <p:spPr>
-          <a:xfrm>
-            <a:off x="914400" y="4983480"/>
-            <a:ext cx="1371600" cy="457200"/>
-          </a:xfrm>
-          <a:prstGeom prst="rect">
-            <a:avLst/>
-          </a:prstGeom>
-          <a:noFill/>
-        </p:spPr>
-        <p:txBody>
-          <a:bodyPr wrap="square">
-            <a:spAutoFit/>
-          </a:bodyPr>
-          <a:lstStyle/>
-          <a:p>
-            <a:pPr algn="l">
-              <a:defRPr sz="1400" b="1">
-                <a:solidFill>
-                  <a:srgbClr val="F1F5F9"/>
-                </a:solidFill>
-                <a:latin typeface="맑은 고딕"/>
-              </a:defRPr>
-            </a:pPr>
-            <a:r>
-              <a:t>6주차</a:t>
-            </a:r>
-          </a:p>
-        </p:txBody>
-      </p:sp>
-      <p:sp>
-        <p:nvSpPr>
-          <p:cNvPr id="26" name="TextBox 25"/>
-          <p:cNvSpPr txBox="1"/>
-          <p:nvPr/>
-        </p:nvSpPr>
-        <p:spPr>
-          <a:xfrm>
-            <a:off x="2286000" y="4983480"/>
-            <a:ext cx="2743200" cy="457200"/>
-          </a:xfrm>
-          <a:prstGeom prst="rect">
-            <a:avLst/>
-          </a:prstGeom>
-          <a:noFill/>
-        </p:spPr>
-        <p:txBody>
-          <a:bodyPr wrap="square">
-            <a:spAutoFit/>
-          </a:bodyPr>
-          <a:lstStyle/>
-          <a:p>
-            <a:pPr algn="l">
-              <a:defRPr sz="1400" b="1">
-                <a:solidFill>
-                  <a:srgbClr val="6366F1"/>
-                </a:solidFill>
-                <a:latin typeface="맑은 고딕"/>
-              </a:defRPr>
-            </a:pPr>
-            <a:r>
-              <a:t>🔧 통합</a:t>
-            </a:r>
-          </a:p>
-        </p:txBody>
-      </p:sp>
-      <p:sp>
-        <p:nvSpPr>
-          <p:cNvPr id="27" name="TextBox 26"/>
-          <p:cNvSpPr txBox="1"/>
-          <p:nvPr/>
-        </p:nvSpPr>
-        <p:spPr>
-          <a:xfrm>
-            <a:off x="5029200" y="4983480"/>
-            <a:ext cx="5943600" cy="457200"/>
-          </a:xfrm>
-          <a:prstGeom prst="rect">
-            <a:avLst/>
-          </a:prstGeom>
-          <a:noFill/>
-        </p:spPr>
-        <p:txBody>
-          <a:bodyPr wrap="square">
-            <a:spAutoFit/>
-          </a:bodyPr>
-          <a:lstStyle/>
-          <a:p>
-            <a:pPr algn="l">
-              <a:defRPr sz="1300" b="0">
-                <a:solidFill>
-                  <a:srgbClr val="94A3B8"/>
-                </a:solidFill>
-                <a:latin typeface="맑은 고딕"/>
-              </a:defRPr>
-            </a:pPr>
-            <a:r>
-              <a:t>통합 테스트, UI 폴리싱</a:t>
-            </a:r>
-          </a:p>
-        </p:txBody>
-      </p:sp>
-      <p:sp>
-        <p:nvSpPr>
-          <p:cNvPr id="28" name="Rounded Rectangle 27"/>
-          <p:cNvSpPr/>
-          <p:nvPr/>
-        </p:nvSpPr>
-        <p:spPr>
-          <a:xfrm>
-            <a:off x="731520" y="5669279"/>
-            <a:ext cx="10698480" cy="640080"/>
+            <a:off x="731520" y="5303520"/>
+            <a:ext cx="10698480" cy="822960"/>
           </a:xfrm>
           <a:prstGeom prst="roundRect">
             <a:avLst/>
@@ -4386,13 +3968,13 @@
       </p:sp>
       <p:sp>
         <p:nvSpPr>
-          <p:cNvPr id="29" name="TextBox 28"/>
-          <p:cNvSpPr txBox="1"/>
-          <p:nvPr/>
-        </p:nvSpPr>
-        <p:spPr>
-          <a:xfrm>
-            <a:off x="914400" y="5760719"/>
+          <p:cNvPr id="18" name="TextBox 17"/>
+          <p:cNvSpPr txBox="1"/>
+          <p:nvPr/>
+        </p:nvSpPr>
+        <p:spPr>
+          <a:xfrm>
+            <a:off x="914400" y="5486400"/>
             <a:ext cx="1371600" cy="457200"/>
           </a:xfrm>
           <a:prstGeom prst="rect">
@@ -4407,7 +3989,7 @@
           <a:lstStyle/>
           <a:p>
             <a:pPr algn="l">
-              <a:defRPr sz="1400" b="1">
+              <a:defRPr sz="1800" b="1">
                 <a:solidFill>
                   <a:srgbClr val="F1F5F9"/>
                 </a:solidFill>
@@ -4415,20 +3997,20 @@
               </a:defRPr>
             </a:pPr>
             <a:r>
-              <a:t>7-8주차</a:t>
-            </a:r>
-          </a:p>
-        </p:txBody>
-      </p:sp>
-      <p:sp>
-        <p:nvSpPr>
-          <p:cNvPr id="30" name="TextBox 29"/>
-          <p:cNvSpPr txBox="1"/>
-          <p:nvPr/>
-        </p:nvSpPr>
-        <p:spPr>
-          <a:xfrm>
-            <a:off x="2286000" y="5760719"/>
+              <a:t>7일차</a:t>
+            </a:r>
+          </a:p>
+        </p:txBody>
+      </p:sp>
+      <p:sp>
+        <p:nvSpPr>
+          <p:cNvPr id="19" name="TextBox 18"/>
+          <p:cNvSpPr txBox="1"/>
+          <p:nvPr/>
+        </p:nvSpPr>
+        <p:spPr>
+          <a:xfrm>
+            <a:off x="2560320" y="5486400"/>
             <a:ext cx="2743200" cy="457200"/>
           </a:xfrm>
           <a:prstGeom prst="rect">
@@ -4443,7 +4025,7 @@
           <a:lstStyle/>
           <a:p>
             <a:pPr algn="l">
-              <a:defRPr sz="1400" b="1">
+              <a:defRPr sz="1800" b="1">
                 <a:solidFill>
                   <a:srgbClr val="F59E0B"/>
                 </a:solidFill>
@@ -4451,20 +4033,20 @@
               </a:defRPr>
             </a:pPr>
             <a:r>
-              <a:t>🎯 마무리</a:t>
-            </a:r>
-          </a:p>
-        </p:txBody>
-      </p:sp>
-      <p:sp>
-        <p:nvSpPr>
-          <p:cNvPr id="31" name="TextBox 30"/>
-          <p:cNvSpPr txBox="1"/>
-          <p:nvPr/>
-        </p:nvSpPr>
-        <p:spPr>
-          <a:xfrm>
-            <a:off x="5029200" y="5760719"/>
+              <a:t>🎯 통합/마무리</a:t>
+            </a:r>
+          </a:p>
+        </p:txBody>
+      </p:sp>
+      <p:sp>
+        <p:nvSpPr>
+          <p:cNvPr id="20" name="TextBox 19"/>
+          <p:cNvSpPr txBox="1"/>
+          <p:nvPr/>
+        </p:nvSpPr>
+        <p:spPr>
+          <a:xfrm>
+            <a:off x="5029200" y="5486400"/>
             <a:ext cx="5943600" cy="457200"/>
           </a:xfrm>
           <a:prstGeom prst="rect">
@@ -4479,7 +4061,7 @@
           <a:lstStyle/>
           <a:p>
             <a:pPr algn="l">
-              <a:defRPr sz="1300" b="0">
+              <a:defRPr sz="1500" b="0">
                 <a:solidFill>
                   <a:srgbClr val="94A3B8"/>
                 </a:solidFill>
@@ -4487,7 +4069,7 @@
               </a:defRPr>
             </a:pPr>
             <a:r>
-              <a:t>버그 수정, 데모 시나리오, 발표 자료</a:t>
+              <a:t>통합 테스트 및 버그 수정, 최종 시연/데모 준비</a:t>
             </a:r>
           </a:p>
         </p:txBody>
@@ -4501,918 +4083,6 @@
 </file>
 
 <file path=ppt/slides/slide11.xml><?xml version="1.0" encoding="utf-8"?>
-<p:sld xmlns:a="http://schemas.openxmlformats.org/drawingml/2006/main" xmlns:p="http://schemas.openxmlformats.org/presentationml/2006/main" xmlns:r="http://schemas.openxmlformats.org/officeDocument/2006/relationships">
-  <p:cSld>
-    <p:bg>
-      <p:bgPr>
-        <a:solidFill>
-          <a:srgbClr val="0F172A"/>
-        </a:solidFill>
-        <a:effectLst/>
-      </p:bgPr>
-    </p:bg>
-    <p:spTree>
-      <p:nvGrpSpPr>
-        <p:cNvPr id="1" name=""/>
-        <p:cNvGrpSpPr/>
-        <p:nvPr/>
-      </p:nvGrpSpPr>
-      <p:grpSpPr/>
-      <p:sp>
-        <p:nvSpPr>
-          <p:cNvPr id="2" name="Rounded Rectangle 1"/>
-          <p:cNvSpPr/>
-          <p:nvPr/>
-        </p:nvSpPr>
-        <p:spPr>
-          <a:xfrm>
-            <a:off x="0" y="0"/>
-            <a:ext cx="12191695" cy="73152"/>
-          </a:xfrm>
-          <a:prstGeom prst="roundRect">
-            <a:avLst/>
-          </a:prstGeom>
-          <a:solidFill>
-            <a:srgbClr val="6366F1"/>
-          </a:solidFill>
-          <a:ln>
-            <a:noFill/>
-          </a:ln>
-        </p:spPr>
-        <p:style>
-          <a:lnRef idx="1">
-            <a:schemeClr val="accent1"/>
-          </a:lnRef>
-          <a:fillRef idx="3">
-            <a:schemeClr val="accent1"/>
-          </a:fillRef>
-          <a:effectRef idx="2">
-            <a:schemeClr val="accent1"/>
-          </a:effectRef>
-          <a:fontRef idx="minor">
-            <a:schemeClr val="lt1"/>
-          </a:fontRef>
-        </p:style>
-        <p:txBody>
-          <a:bodyPr rtlCol="0" anchor="ctr"/>
-          <a:lstStyle/>
-          <a:p>
-            <a:pPr algn="ctr"/>
-          </a:p>
-        </p:txBody>
-      </p:sp>
-      <p:sp>
-        <p:nvSpPr>
-          <p:cNvPr id="3" name="TextBox 2"/>
-          <p:cNvSpPr txBox="1"/>
-          <p:nvPr/>
-        </p:nvSpPr>
-        <p:spPr>
-          <a:xfrm>
-            <a:off x="731520" y="274320"/>
-            <a:ext cx="9144000" cy="548640"/>
-          </a:xfrm>
-          <a:prstGeom prst="rect">
-            <a:avLst/>
-          </a:prstGeom>
-          <a:noFill/>
-        </p:spPr>
-        <p:txBody>
-          <a:bodyPr wrap="square">
-            <a:spAutoFit/>
-          </a:bodyPr>
-          <a:lstStyle/>
-          <a:p>
-            <a:pPr algn="l">
-              <a:defRPr sz="2800" b="1">
-                <a:solidFill>
-                  <a:srgbClr val="6366F1"/>
-                </a:solidFill>
-                <a:latin typeface="맑은 고딕"/>
-              </a:defRPr>
-            </a:pPr>
-            <a:r>
-              <a:t>📌 팀원 역할 (5인)</a:t>
-            </a:r>
-          </a:p>
-        </p:txBody>
-      </p:sp>
-      <p:sp>
-        <p:nvSpPr>
-          <p:cNvPr id="4" name="Rounded Rectangle 3"/>
-          <p:cNvSpPr/>
-          <p:nvPr/>
-        </p:nvSpPr>
-        <p:spPr>
-          <a:xfrm>
-            <a:off x="457200" y="1188720"/>
-            <a:ext cx="2103120" cy="4114800"/>
-          </a:xfrm>
-          <a:prstGeom prst="roundRect">
-            <a:avLst/>
-          </a:prstGeom>
-          <a:solidFill>
-            <a:srgbClr val="1E293B"/>
-          </a:solidFill>
-          <a:ln>
-            <a:noFill/>
-          </a:ln>
-        </p:spPr>
-        <p:style>
-          <a:lnRef idx="1">
-            <a:schemeClr val="accent1"/>
-          </a:lnRef>
-          <a:fillRef idx="3">
-            <a:schemeClr val="accent1"/>
-          </a:fillRef>
-          <a:effectRef idx="2">
-            <a:schemeClr val="accent1"/>
-          </a:effectRef>
-          <a:fontRef idx="minor">
-            <a:schemeClr val="lt1"/>
-          </a:fontRef>
-        </p:style>
-        <p:txBody>
-          <a:bodyPr rtlCol="0" anchor="ctr"/>
-          <a:lstStyle/>
-          <a:p>
-            <a:pPr algn="ctr"/>
-          </a:p>
-        </p:txBody>
-      </p:sp>
-      <p:sp>
-        <p:nvSpPr>
-          <p:cNvPr id="5" name="TextBox 4"/>
-          <p:cNvSpPr txBox="1"/>
-          <p:nvPr/>
-        </p:nvSpPr>
-        <p:spPr>
-          <a:xfrm>
-            <a:off x="457200" y="1371600"/>
-            <a:ext cx="2103120" cy="731520"/>
-          </a:xfrm>
-          <a:prstGeom prst="rect">
-            <a:avLst/>
-          </a:prstGeom>
-          <a:noFill/>
-        </p:spPr>
-        <p:txBody>
-          <a:bodyPr wrap="square">
-            <a:spAutoFit/>
-          </a:bodyPr>
-          <a:lstStyle/>
-          <a:p>
-            <a:pPr algn="ctr">
-              <a:defRPr sz="4000" b="0">
-                <a:solidFill>
-                  <a:srgbClr val="F1F5F9"/>
-                </a:solidFill>
-                <a:latin typeface="맑은 고딕"/>
-              </a:defRPr>
-            </a:pPr>
-            <a:r>
-              <a:t>👩‍💻</a:t>
-            </a:r>
-          </a:p>
-        </p:txBody>
-      </p:sp>
-      <p:sp>
-        <p:nvSpPr>
-          <p:cNvPr id="6" name="TextBox 5"/>
-          <p:cNvSpPr txBox="1"/>
-          <p:nvPr/>
-        </p:nvSpPr>
-        <p:spPr>
-          <a:xfrm>
-            <a:off x="457200" y="2194560"/>
-            <a:ext cx="2103120" cy="731520"/>
-          </a:xfrm>
-          <a:prstGeom prst="rect">
-            <a:avLst/>
-          </a:prstGeom>
-          <a:noFill/>
-        </p:spPr>
-        <p:txBody>
-          <a:bodyPr wrap="square">
-            <a:spAutoFit/>
-          </a:bodyPr>
-          <a:lstStyle/>
-          <a:p>
-            <a:pPr algn="ctr">
-              <a:defRPr sz="1600" b="1">
-                <a:solidFill>
-                  <a:srgbClr val="6366F1"/>
-                </a:solidFill>
-                <a:latin typeface="맑은 고딕"/>
-              </a:defRPr>
-            </a:pPr>
-            <a:r>
-              <a:t>프론트 A</a:t>
-            </a:r>
-          </a:p>
-        </p:txBody>
-      </p:sp>
-      <p:sp>
-        <p:nvSpPr>
-          <p:cNvPr id="7" name="TextBox 6"/>
-          <p:cNvSpPr txBox="1"/>
-          <p:nvPr/>
-        </p:nvSpPr>
-        <p:spPr>
-          <a:xfrm>
-            <a:off x="457200" y="3108960"/>
-            <a:ext cx="2103120" cy="1828800"/>
-          </a:xfrm>
-          <a:prstGeom prst="rect">
-            <a:avLst/>
-          </a:prstGeom>
-          <a:noFill/>
-        </p:spPr>
-        <p:txBody>
-          <a:bodyPr wrap="square">
-            <a:spAutoFit/>
-          </a:bodyPr>
-          <a:lstStyle/>
-          <a:p>
-            <a:pPr algn="ctr">
-              <a:defRPr sz="1300" b="0">
-                <a:solidFill>
-                  <a:srgbClr val="94A3B8"/>
-                </a:solidFill>
-                <a:latin typeface="맑은 고딕"/>
-              </a:defRPr>
-            </a:pPr>
-            <a:r>
-              <a:t>메인 홈</a:t>
-            </a:r>
-            <a:br/>
-            <a:r>
-              <a:t>이벤트(목록/상세/생성)</a:t>
-            </a:r>
-            <a:br/>
-            <a:r>
-              <a:t>검색/필터</a:t>
-            </a:r>
-          </a:p>
-        </p:txBody>
-      </p:sp>
-      <p:sp>
-        <p:nvSpPr>
-          <p:cNvPr id="8" name="Rounded Rectangle 7"/>
-          <p:cNvSpPr/>
-          <p:nvPr/>
-        </p:nvSpPr>
-        <p:spPr>
-          <a:xfrm>
-            <a:off x="2834640" y="1188720"/>
-            <a:ext cx="2103120" cy="4114800"/>
-          </a:xfrm>
-          <a:prstGeom prst="roundRect">
-            <a:avLst/>
-          </a:prstGeom>
-          <a:solidFill>
-            <a:srgbClr val="1E293B"/>
-          </a:solidFill>
-          <a:ln>
-            <a:noFill/>
-          </a:ln>
-        </p:spPr>
-        <p:style>
-          <a:lnRef idx="1">
-            <a:schemeClr val="accent1"/>
-          </a:lnRef>
-          <a:fillRef idx="3">
-            <a:schemeClr val="accent1"/>
-          </a:fillRef>
-          <a:effectRef idx="2">
-            <a:schemeClr val="accent1"/>
-          </a:effectRef>
-          <a:fontRef idx="minor">
-            <a:schemeClr val="lt1"/>
-          </a:fontRef>
-        </p:style>
-        <p:txBody>
-          <a:bodyPr rtlCol="0" anchor="ctr"/>
-          <a:lstStyle/>
-          <a:p>
-            <a:pPr algn="ctr"/>
-          </a:p>
-        </p:txBody>
-      </p:sp>
-      <p:sp>
-        <p:nvSpPr>
-          <p:cNvPr id="9" name="TextBox 8"/>
-          <p:cNvSpPr txBox="1"/>
-          <p:nvPr/>
-        </p:nvSpPr>
-        <p:spPr>
-          <a:xfrm>
-            <a:off x="2834640" y="1371600"/>
-            <a:ext cx="2103120" cy="731520"/>
-          </a:xfrm>
-          <a:prstGeom prst="rect">
-            <a:avLst/>
-          </a:prstGeom>
-          <a:noFill/>
-        </p:spPr>
-        <p:txBody>
-          <a:bodyPr wrap="square">
-            <a:spAutoFit/>
-          </a:bodyPr>
-          <a:lstStyle/>
-          <a:p>
-            <a:pPr algn="ctr">
-              <a:defRPr sz="4000" b="0">
-                <a:solidFill>
-                  <a:srgbClr val="F1F5F9"/>
-                </a:solidFill>
-                <a:latin typeface="맑은 고딕"/>
-              </a:defRPr>
-            </a:pPr>
-            <a:r>
-              <a:t>👨‍💻</a:t>
-            </a:r>
-          </a:p>
-        </p:txBody>
-      </p:sp>
-      <p:sp>
-        <p:nvSpPr>
-          <p:cNvPr id="10" name="TextBox 9"/>
-          <p:cNvSpPr txBox="1"/>
-          <p:nvPr/>
-        </p:nvSpPr>
-        <p:spPr>
-          <a:xfrm>
-            <a:off x="2834640" y="2194560"/>
-            <a:ext cx="2103120" cy="731520"/>
-          </a:xfrm>
-          <a:prstGeom prst="rect">
-            <a:avLst/>
-          </a:prstGeom>
-          <a:noFill/>
-        </p:spPr>
-        <p:txBody>
-          <a:bodyPr wrap="square">
-            <a:spAutoFit/>
-          </a:bodyPr>
-          <a:lstStyle/>
-          <a:p>
-            <a:pPr algn="ctr">
-              <a:defRPr sz="1600" b="1">
-                <a:solidFill>
-                  <a:srgbClr val="6366F1"/>
-                </a:solidFill>
-                <a:latin typeface="맑은 고딕"/>
-              </a:defRPr>
-            </a:pPr>
-            <a:r>
-              <a:t>프론트 B</a:t>
-            </a:r>
-          </a:p>
-        </p:txBody>
-      </p:sp>
-      <p:sp>
-        <p:nvSpPr>
-          <p:cNvPr id="11" name="TextBox 10"/>
-          <p:cNvSpPr txBox="1"/>
-          <p:nvPr/>
-        </p:nvSpPr>
-        <p:spPr>
-          <a:xfrm>
-            <a:off x="2834640" y="3108960"/>
-            <a:ext cx="2103120" cy="1828800"/>
-          </a:xfrm>
-          <a:prstGeom prst="rect">
-            <a:avLst/>
-          </a:prstGeom>
-          <a:noFill/>
-        </p:spPr>
-        <p:txBody>
-          <a:bodyPr wrap="square">
-            <a:spAutoFit/>
-          </a:bodyPr>
-          <a:lstStyle/>
-          <a:p>
-            <a:pPr algn="ctr">
-              <a:defRPr sz="1300" b="0">
-                <a:solidFill>
-                  <a:srgbClr val="94A3B8"/>
-                </a:solidFill>
-                <a:latin typeface="맑은 고딕"/>
-              </a:defRPr>
-            </a:pPr>
-            <a:r>
-              <a:t>커뮤니티</a:t>
-            </a:r>
-            <a:br/>
-            <a:r>
-              <a:t>(목록/상세/글 작성)</a:t>
-            </a:r>
-            <a:br/>
-            <a:r>
-              <a:t>마이페이지</a:t>
-            </a:r>
-          </a:p>
-        </p:txBody>
-      </p:sp>
-      <p:sp>
-        <p:nvSpPr>
-          <p:cNvPr id="12" name="Rounded Rectangle 11"/>
-          <p:cNvSpPr/>
-          <p:nvPr/>
-        </p:nvSpPr>
-        <p:spPr>
-          <a:xfrm>
-            <a:off x="5212080" y="1188720"/>
-            <a:ext cx="2103120" cy="4114800"/>
-          </a:xfrm>
-          <a:prstGeom prst="roundRect">
-            <a:avLst/>
-          </a:prstGeom>
-          <a:solidFill>
-            <a:srgbClr val="1E293B"/>
-          </a:solidFill>
-          <a:ln>
-            <a:noFill/>
-          </a:ln>
-        </p:spPr>
-        <p:style>
-          <a:lnRef idx="1">
-            <a:schemeClr val="accent1"/>
-          </a:lnRef>
-          <a:fillRef idx="3">
-            <a:schemeClr val="accent1"/>
-          </a:fillRef>
-          <a:effectRef idx="2">
-            <a:schemeClr val="accent1"/>
-          </a:effectRef>
-          <a:fontRef idx="minor">
-            <a:schemeClr val="lt1"/>
-          </a:fontRef>
-        </p:style>
-        <p:txBody>
-          <a:bodyPr rtlCol="0" anchor="ctr"/>
-          <a:lstStyle/>
-          <a:p>
-            <a:pPr algn="ctr"/>
-          </a:p>
-        </p:txBody>
-      </p:sp>
-      <p:sp>
-        <p:nvSpPr>
-          <p:cNvPr id="13" name="TextBox 12"/>
-          <p:cNvSpPr txBox="1"/>
-          <p:nvPr/>
-        </p:nvSpPr>
-        <p:spPr>
-          <a:xfrm>
-            <a:off x="5212080" y="1371600"/>
-            <a:ext cx="2103120" cy="731520"/>
-          </a:xfrm>
-          <a:prstGeom prst="rect">
-            <a:avLst/>
-          </a:prstGeom>
-          <a:noFill/>
-        </p:spPr>
-        <p:txBody>
-          <a:bodyPr wrap="square">
-            <a:spAutoFit/>
-          </a:bodyPr>
-          <a:lstStyle/>
-          <a:p>
-            <a:pPr algn="ctr">
-              <a:defRPr sz="4000" b="0">
-                <a:solidFill>
-                  <a:srgbClr val="F1F5F9"/>
-                </a:solidFill>
-                <a:latin typeface="맑은 고딕"/>
-              </a:defRPr>
-            </a:pPr>
-            <a:r>
-              <a:t>⚙️</a:t>
-            </a:r>
-          </a:p>
-        </p:txBody>
-      </p:sp>
-      <p:sp>
-        <p:nvSpPr>
-          <p:cNvPr id="14" name="TextBox 13"/>
-          <p:cNvSpPr txBox="1"/>
-          <p:nvPr/>
-        </p:nvSpPr>
-        <p:spPr>
-          <a:xfrm>
-            <a:off x="5212080" y="2194560"/>
-            <a:ext cx="2103120" cy="731520"/>
-          </a:xfrm>
-          <a:prstGeom prst="rect">
-            <a:avLst/>
-          </a:prstGeom>
-          <a:noFill/>
-        </p:spPr>
-        <p:txBody>
-          <a:bodyPr wrap="square">
-            <a:spAutoFit/>
-          </a:bodyPr>
-          <a:lstStyle/>
-          <a:p>
-            <a:pPr algn="ctr">
-              <a:defRPr sz="1600" b="1">
-                <a:solidFill>
-                  <a:srgbClr val="6366F1"/>
-                </a:solidFill>
-                <a:latin typeface="맑은 고딕"/>
-              </a:defRPr>
-            </a:pPr>
-            <a:r>
-              <a:t>백엔드</a:t>
-            </a:r>
-            <a:br/>
-            <a:r>
-              <a:t>User+Gateway</a:t>
-            </a:r>
-          </a:p>
-        </p:txBody>
-      </p:sp>
-      <p:sp>
-        <p:nvSpPr>
-          <p:cNvPr id="15" name="TextBox 14"/>
-          <p:cNvSpPr txBox="1"/>
-          <p:nvPr/>
-        </p:nvSpPr>
-        <p:spPr>
-          <a:xfrm>
-            <a:off x="5212080" y="3108960"/>
-            <a:ext cx="2103120" cy="1828800"/>
-          </a:xfrm>
-          <a:prstGeom prst="rect">
-            <a:avLst/>
-          </a:prstGeom>
-          <a:noFill/>
-        </p:spPr>
-        <p:txBody>
-          <a:bodyPr wrap="square">
-            <a:spAutoFit/>
-          </a:bodyPr>
-          <a:lstStyle/>
-          <a:p>
-            <a:pPr algn="ctr">
-              <a:defRPr sz="1300" b="0">
-                <a:solidFill>
-                  <a:srgbClr val="94A3B8"/>
-                </a:solidFill>
-                <a:latin typeface="맑은 고딕"/>
-              </a:defRPr>
-            </a:pPr>
-            <a:r>
-              <a:t>회원가입/JWT</a:t>
-            </a:r>
-            <a:br/>
-            <a:r>
-              <a:t>Gateway</a:t>
-            </a:r>
-            <a:br/>
-            <a:r>
-              <a:t>Redis</a:t>
-            </a:r>
-          </a:p>
-        </p:txBody>
-      </p:sp>
-      <p:sp>
-        <p:nvSpPr>
-          <p:cNvPr id="16" name="Rounded Rectangle 15"/>
-          <p:cNvSpPr/>
-          <p:nvPr/>
-        </p:nvSpPr>
-        <p:spPr>
-          <a:xfrm>
-            <a:off x="7589520" y="1188720"/>
-            <a:ext cx="2103120" cy="4114800"/>
-          </a:xfrm>
-          <a:prstGeom prst="roundRect">
-            <a:avLst/>
-          </a:prstGeom>
-          <a:solidFill>
-            <a:srgbClr val="1E293B"/>
-          </a:solidFill>
-          <a:ln>
-            <a:noFill/>
-          </a:ln>
-        </p:spPr>
-        <p:style>
-          <a:lnRef idx="1">
-            <a:schemeClr val="accent1"/>
-          </a:lnRef>
-          <a:fillRef idx="3">
-            <a:schemeClr val="accent1"/>
-          </a:fillRef>
-          <a:effectRef idx="2">
-            <a:schemeClr val="accent1"/>
-          </a:effectRef>
-          <a:fontRef idx="minor">
-            <a:schemeClr val="lt1"/>
-          </a:fontRef>
-        </p:style>
-        <p:txBody>
-          <a:bodyPr rtlCol="0" anchor="ctr"/>
-          <a:lstStyle/>
-          <a:p>
-            <a:pPr algn="ctr"/>
-          </a:p>
-        </p:txBody>
-      </p:sp>
-      <p:sp>
-        <p:nvSpPr>
-          <p:cNvPr id="17" name="TextBox 16"/>
-          <p:cNvSpPr txBox="1"/>
-          <p:nvPr/>
-        </p:nvSpPr>
-        <p:spPr>
-          <a:xfrm>
-            <a:off x="7589520" y="1371600"/>
-            <a:ext cx="2103120" cy="731520"/>
-          </a:xfrm>
-          <a:prstGeom prst="rect">
-            <a:avLst/>
-          </a:prstGeom>
-          <a:noFill/>
-        </p:spPr>
-        <p:txBody>
-          <a:bodyPr wrap="square">
-            <a:spAutoFit/>
-          </a:bodyPr>
-          <a:lstStyle/>
-          <a:p>
-            <a:pPr algn="ctr">
-              <a:defRPr sz="4000" b="0">
-                <a:solidFill>
-                  <a:srgbClr val="F1F5F9"/>
-                </a:solidFill>
-                <a:latin typeface="맑은 고딕"/>
-              </a:defRPr>
-            </a:pPr>
-            <a:r>
-              <a:t>🎫</a:t>
-            </a:r>
-          </a:p>
-        </p:txBody>
-      </p:sp>
-      <p:sp>
-        <p:nvSpPr>
-          <p:cNvPr id="18" name="TextBox 17"/>
-          <p:cNvSpPr txBox="1"/>
-          <p:nvPr/>
-        </p:nvSpPr>
-        <p:spPr>
-          <a:xfrm>
-            <a:off x="7589520" y="2194560"/>
-            <a:ext cx="2103120" cy="731520"/>
-          </a:xfrm>
-          <a:prstGeom prst="rect">
-            <a:avLst/>
-          </a:prstGeom>
-          <a:noFill/>
-        </p:spPr>
-        <p:txBody>
-          <a:bodyPr wrap="square">
-            <a:spAutoFit/>
-          </a:bodyPr>
-          <a:lstStyle/>
-          <a:p>
-            <a:pPr algn="ctr">
-              <a:defRPr sz="1600" b="1">
-                <a:solidFill>
-                  <a:srgbClr val="6366F1"/>
-                </a:solidFill>
-                <a:latin typeface="맑은 고딕"/>
-              </a:defRPr>
-            </a:pPr>
-            <a:r>
-              <a:t>백엔드</a:t>
-            </a:r>
-            <a:br/>
-            <a:r>
-              <a:t>Event</a:t>
-            </a:r>
-          </a:p>
-        </p:txBody>
-      </p:sp>
-      <p:sp>
-        <p:nvSpPr>
-          <p:cNvPr id="19" name="TextBox 18"/>
-          <p:cNvSpPr txBox="1"/>
-          <p:nvPr/>
-        </p:nvSpPr>
-        <p:spPr>
-          <a:xfrm>
-            <a:off x="7589520" y="3108960"/>
-            <a:ext cx="2103120" cy="1828800"/>
-          </a:xfrm>
-          <a:prstGeom prst="rect">
-            <a:avLst/>
-          </a:prstGeom>
-          <a:noFill/>
-        </p:spPr>
-        <p:txBody>
-          <a:bodyPr wrap="square">
-            <a:spAutoFit/>
-          </a:bodyPr>
-          <a:lstStyle/>
-          <a:p>
-            <a:pPr algn="ctr">
-              <a:defRPr sz="1300" b="0">
-                <a:solidFill>
-                  <a:srgbClr val="94A3B8"/>
-                </a:solidFill>
-                <a:latin typeface="맑은 고딕"/>
-              </a:defRPr>
-            </a:pPr>
-            <a:r>
-              <a:t>이벤트/세션/티켓</a:t>
-            </a:r>
-            <a:br/>
-            <a:r>
-              <a:t>CRUD</a:t>
-            </a:r>
-            <a:br/>
-            <a:r>
-              <a:t>결제, 구매내역</a:t>
-            </a:r>
-          </a:p>
-        </p:txBody>
-      </p:sp>
-      <p:sp>
-        <p:nvSpPr>
-          <p:cNvPr id="20" name="Rounded Rectangle 19"/>
-          <p:cNvSpPr/>
-          <p:nvPr/>
-        </p:nvSpPr>
-        <p:spPr>
-          <a:xfrm>
-            <a:off x="9966960" y="1188720"/>
-            <a:ext cx="2103120" cy="4114800"/>
-          </a:xfrm>
-          <a:prstGeom prst="roundRect">
-            <a:avLst/>
-          </a:prstGeom>
-          <a:solidFill>
-            <a:srgbClr val="1E293B"/>
-          </a:solidFill>
-          <a:ln>
-            <a:noFill/>
-          </a:ln>
-        </p:spPr>
-        <p:style>
-          <a:lnRef idx="1">
-            <a:schemeClr val="accent1"/>
-          </a:lnRef>
-          <a:fillRef idx="3">
-            <a:schemeClr val="accent1"/>
-          </a:fillRef>
-          <a:effectRef idx="2">
-            <a:schemeClr val="accent1"/>
-          </a:effectRef>
-          <a:fontRef idx="minor">
-            <a:schemeClr val="lt1"/>
-          </a:fontRef>
-        </p:style>
-        <p:txBody>
-          <a:bodyPr rtlCol="0" anchor="ctr"/>
-          <a:lstStyle/>
-          <a:p>
-            <a:pPr algn="ctr"/>
-          </a:p>
-        </p:txBody>
-      </p:sp>
-      <p:sp>
-        <p:nvSpPr>
-          <p:cNvPr id="21" name="TextBox 20"/>
-          <p:cNvSpPr txBox="1"/>
-          <p:nvPr/>
-        </p:nvSpPr>
-        <p:spPr>
-          <a:xfrm>
-            <a:off x="9966960" y="1371600"/>
-            <a:ext cx="2103120" cy="731520"/>
-          </a:xfrm>
-          <a:prstGeom prst="rect">
-            <a:avLst/>
-          </a:prstGeom>
-          <a:noFill/>
-        </p:spPr>
-        <p:txBody>
-          <a:bodyPr wrap="square">
-            <a:spAutoFit/>
-          </a:bodyPr>
-          <a:lstStyle/>
-          <a:p>
-            <a:pPr algn="ctr">
-              <a:defRPr sz="4000" b="0">
-                <a:solidFill>
-                  <a:srgbClr val="F1F5F9"/>
-                </a:solidFill>
-                <a:latin typeface="맑은 고딕"/>
-              </a:defRPr>
-            </a:pPr>
-            <a:r>
-              <a:t>💬</a:t>
-            </a:r>
-          </a:p>
-        </p:txBody>
-      </p:sp>
-      <p:sp>
-        <p:nvSpPr>
-          <p:cNvPr id="22" name="TextBox 21"/>
-          <p:cNvSpPr txBox="1"/>
-          <p:nvPr/>
-        </p:nvSpPr>
-        <p:spPr>
-          <a:xfrm>
-            <a:off x="9966960" y="2194560"/>
-            <a:ext cx="2103120" cy="731520"/>
-          </a:xfrm>
-          <a:prstGeom prst="rect">
-            <a:avLst/>
-          </a:prstGeom>
-          <a:noFill/>
-        </p:spPr>
-        <p:txBody>
-          <a:bodyPr wrap="square">
-            <a:spAutoFit/>
-          </a:bodyPr>
-          <a:lstStyle/>
-          <a:p>
-            <a:pPr algn="ctr">
-              <a:defRPr sz="1600" b="1">
-                <a:solidFill>
-                  <a:srgbClr val="6366F1"/>
-                </a:solidFill>
-                <a:latin typeface="맑은 고딕"/>
-              </a:defRPr>
-            </a:pPr>
-            <a:r>
-              <a:t>백엔드</a:t>
-            </a:r>
-            <a:br/>
-            <a:r>
-              <a:t>Community</a:t>
-            </a:r>
-          </a:p>
-        </p:txBody>
-      </p:sp>
-      <p:sp>
-        <p:nvSpPr>
-          <p:cNvPr id="23" name="TextBox 22"/>
-          <p:cNvSpPr txBox="1"/>
-          <p:nvPr/>
-        </p:nvSpPr>
-        <p:spPr>
-          <a:xfrm>
-            <a:off x="9966960" y="3108960"/>
-            <a:ext cx="2103120" cy="1828800"/>
-          </a:xfrm>
-          <a:prstGeom prst="rect">
-            <a:avLst/>
-          </a:prstGeom>
-          <a:noFill/>
-        </p:spPr>
-        <p:txBody>
-          <a:bodyPr wrap="square">
-            <a:spAutoFit/>
-          </a:bodyPr>
-          <a:lstStyle/>
-          <a:p>
-            <a:pPr algn="ctr">
-              <a:defRPr sz="1300" b="0">
-                <a:solidFill>
-                  <a:srgbClr val="94A3B8"/>
-                </a:solidFill>
-                <a:latin typeface="맑은 고딕"/>
-              </a:defRPr>
-            </a:pPr>
-            <a:r>
-              <a:t>커뮤니티/게시글</a:t>
-            </a:r>
-            <a:br/>
-            <a:r>
-              <a:t>댓글 CRUD</a:t>
-            </a:r>
-            <a:br/>
-            <a:r>
-              <a:t>OpenFeign</a:t>
-            </a:r>
-          </a:p>
-        </p:txBody>
-      </p:sp>
-    </p:spTree>
-  </p:cSld>
-  <p:clrMapOvr>
-    <a:masterClrMapping/>
-  </p:clrMapOvr>
-</p:sld>
-</file>
-
-<file path=ppt/slides/slide12.xml><?xml version="1.0" encoding="utf-8"?>
 <p:sld xmlns:a="http://schemas.openxmlformats.org/drawingml/2006/main" xmlns:p="http://schemas.openxmlformats.org/presentationml/2006/main" xmlns:r="http://schemas.openxmlformats.org/officeDocument/2006/relationships">
   <p:cSld>
     <p:bg>
